--- a/referat/referat_presentation/0MI0600328.pptx
+++ b/referat/referat_presentation/0MI0600328.pptx
@@ -114,6 +114,11 @@
       </a:defRPr>
     </a:lvl9pPr>
   </p:defaultTextStyle>
+  <p:extLst>
+    <p:ext uri="{EFAFB233-063F-42B5-8137-9DF3F51BA10A}">
+      <p15:sldGuideLst xmlns:p15="http://schemas.microsoft.com/office/powerpoint/2012/main"/>
+    </p:ext>
+  </p:extLst>
 </p:presentation>
 </file>
 
@@ -281,7 +286,7 @@
           <a:effectLst/>
           <a:extLst>
             <a:ext uri="{91240B29-F687-4f45-9708-019B960494DF}">
-              <a14:hiddenLine xmlns:a14="http://schemas.microsoft.com/office/drawing/2010/main" xmlns="" w="9525">
+              <a14:hiddenLine xmlns="" xmlns:a14="http://schemas.microsoft.com/office/drawing/2010/main" w="9525">
                 <a:solidFill>
                   <a:srgbClr val="000000"/>
                 </a:solidFill>
@@ -306,6 +311,13 @@
             <a:schemeClr val="lt1"/>
           </a:fontRef>
         </p:style>
+        <p:txBody>
+          <a:bodyPr/>
+          <a:lstStyle/>
+          <a:p>
+            <a:endParaRPr lang="en-BG"/>
+          </a:p>
+        </p:txBody>
       </p:sp>
       <p:sp>
         <p:nvSpPr>
@@ -1803,7 +1815,7 @@
           <a:ln/>
           <a:extLst>
             <a:ext uri="{91240B29-F687-4f45-9708-019B960494DF}">
-              <a14:hiddenLine xmlns:a14="http://schemas.microsoft.com/office/drawing/2010/main" xmlns="" w="9525">
+              <a14:hiddenLine xmlns="" xmlns:a14="http://schemas.microsoft.com/office/drawing/2010/main" w="9525">
                 <a:solidFill>
                   <a:srgbClr val="000000"/>
                 </a:solidFill>
@@ -2078,7 +2090,7 @@
           <a:ln/>
           <a:extLst>
             <a:ext uri="{91240B29-F687-4f45-9708-019B960494DF}">
-              <a14:hiddenLine xmlns:a14="http://schemas.microsoft.com/office/drawing/2010/main" xmlns="" w="9525">
+              <a14:hiddenLine xmlns="" xmlns:a14="http://schemas.microsoft.com/office/drawing/2010/main" w="9525">
                 <a:solidFill>
                   <a:srgbClr val="000000"/>
                 </a:solidFill>
@@ -2361,7 +2373,7 @@
           <a:ln/>
           <a:extLst>
             <a:ext uri="{91240B29-F687-4f45-9708-019B960494DF}">
-              <a14:hiddenLine xmlns:a14="http://schemas.microsoft.com/office/drawing/2010/main" xmlns="" w="9525">
+              <a14:hiddenLine xmlns="" xmlns:a14="http://schemas.microsoft.com/office/drawing/2010/main" w="9525">
                 <a:solidFill>
                   <a:srgbClr val="000000"/>
                 </a:solidFill>
@@ -2987,7 +2999,7 @@
           <a:ln/>
           <a:extLst>
             <a:ext uri="{91240B29-F687-4f45-9708-019B960494DF}">
-              <a14:hiddenLine xmlns:a14="http://schemas.microsoft.com/office/drawing/2010/main" xmlns="" w="9525">
+              <a14:hiddenLine xmlns="" xmlns:a14="http://schemas.microsoft.com/office/drawing/2010/main" w="9525">
                 <a:solidFill>
                   <a:srgbClr val="000000"/>
                 </a:solidFill>
@@ -3326,7 +3338,7 @@
           <a:ln/>
           <a:extLst>
             <a:ext uri="{91240B29-F687-4f45-9708-019B960494DF}">
-              <a14:hiddenLine xmlns:a14="http://schemas.microsoft.com/office/drawing/2010/main" xmlns="" w="9525">
+              <a14:hiddenLine xmlns="" xmlns:a14="http://schemas.microsoft.com/office/drawing/2010/main" w="9525">
                 <a:solidFill>
                   <a:srgbClr val="000000"/>
                 </a:solidFill>
@@ -3803,7 +3815,7 @@
           <a:ln/>
           <a:extLst>
             <a:ext uri="{91240B29-F687-4f45-9708-019B960494DF}">
-              <a14:hiddenLine xmlns:a14="http://schemas.microsoft.com/office/drawing/2010/main" xmlns="" w="9525">
+              <a14:hiddenLine xmlns="" xmlns:a14="http://schemas.microsoft.com/office/drawing/2010/main" w="9525">
                 <a:solidFill>
                   <a:srgbClr val="000000"/>
                 </a:solidFill>
@@ -4232,7 +4244,7 @@
           <a:ln/>
           <a:extLst>
             <a:ext uri="{91240B29-F687-4f45-9708-019B960494DF}">
-              <a14:hiddenLine xmlns:a14="http://schemas.microsoft.com/office/drawing/2010/main" xmlns="" w="9525">
+              <a14:hiddenLine xmlns="" xmlns:a14="http://schemas.microsoft.com/office/drawing/2010/main" w="9525">
                 <a:solidFill>
                   <a:srgbClr val="000000"/>
                 </a:solidFill>
@@ -6372,28 +6384,15 @@
             <p:ph idx="1"/>
           </p:nvPr>
         </p:nvSpPr>
-        <p:spPr/>
+        <p:spPr>
+          <a:xfrm>
+            <a:off x="810000" y="1971915"/>
+            <a:ext cx="10554574" cy="3636511"/>
+          </a:xfrm>
+        </p:spPr>
         <p:txBody>
           <a:bodyPr/>
           <a:lstStyle/>
-          <a:p>
-            <a:r>
-              <a:rPr lang="bg-BG" dirty="0"/>
-              <a:t>Какво е</a:t>
-            </a:r>
-            <a:r>
-              <a:rPr lang="en-GB" dirty="0"/>
-              <a:t> </a:t>
-            </a:r>
-            <a:r>
-              <a:rPr lang="en-GB" dirty="0" err="1"/>
-              <a:t>SubtleCrypto</a:t>
-            </a:r>
-            <a:r>
-              <a:rPr lang="bg-BG" dirty="0"/>
-              <a:t>?</a:t>
-            </a:r>
-          </a:p>
           <a:p>
             <a:r>
               <a:rPr lang="bg-BG" dirty="0"/>

--- a/referat/referat_presentation/0MI0600328.pptx
+++ b/referat/referat_presentation/0MI0600328.pptx
@@ -286,7 +286,7 @@
           <a:effectLst/>
           <a:extLst>
             <a:ext uri="{91240B29-F687-4f45-9708-019B960494DF}">
-              <a14:hiddenLine xmlns="" xmlns:a14="http://schemas.microsoft.com/office/drawing/2010/main" w="9525">
+              <a14:hiddenLine xmlns:a14="http://schemas.microsoft.com/office/drawing/2010/main" xmlns="" w="9525">
                 <a:solidFill>
                   <a:srgbClr val="000000"/>
                 </a:solidFill>
@@ -1815,7 +1815,7 @@
           <a:ln/>
           <a:extLst>
             <a:ext uri="{91240B29-F687-4f45-9708-019B960494DF}">
-              <a14:hiddenLine xmlns="" xmlns:a14="http://schemas.microsoft.com/office/drawing/2010/main" w="9525">
+              <a14:hiddenLine xmlns:a14="http://schemas.microsoft.com/office/drawing/2010/main" xmlns="" w="9525">
                 <a:solidFill>
                   <a:srgbClr val="000000"/>
                 </a:solidFill>
@@ -2090,7 +2090,7 @@
           <a:ln/>
           <a:extLst>
             <a:ext uri="{91240B29-F687-4f45-9708-019B960494DF}">
-              <a14:hiddenLine xmlns="" xmlns:a14="http://schemas.microsoft.com/office/drawing/2010/main" w="9525">
+              <a14:hiddenLine xmlns:a14="http://schemas.microsoft.com/office/drawing/2010/main" xmlns="" w="9525">
                 <a:solidFill>
                   <a:srgbClr val="000000"/>
                 </a:solidFill>
@@ -2373,7 +2373,7 @@
           <a:ln/>
           <a:extLst>
             <a:ext uri="{91240B29-F687-4f45-9708-019B960494DF}">
-              <a14:hiddenLine xmlns="" xmlns:a14="http://schemas.microsoft.com/office/drawing/2010/main" w="9525">
+              <a14:hiddenLine xmlns:a14="http://schemas.microsoft.com/office/drawing/2010/main" xmlns="" w="9525">
                 <a:solidFill>
                   <a:srgbClr val="000000"/>
                 </a:solidFill>
@@ -2999,7 +2999,7 @@
           <a:ln/>
           <a:extLst>
             <a:ext uri="{91240B29-F687-4f45-9708-019B960494DF}">
-              <a14:hiddenLine xmlns="" xmlns:a14="http://schemas.microsoft.com/office/drawing/2010/main" w="9525">
+              <a14:hiddenLine xmlns:a14="http://schemas.microsoft.com/office/drawing/2010/main" xmlns="" w="9525">
                 <a:solidFill>
                   <a:srgbClr val="000000"/>
                 </a:solidFill>
@@ -3338,7 +3338,7 @@
           <a:ln/>
           <a:extLst>
             <a:ext uri="{91240B29-F687-4f45-9708-019B960494DF}">
-              <a14:hiddenLine xmlns="" xmlns:a14="http://schemas.microsoft.com/office/drawing/2010/main" w="9525">
+              <a14:hiddenLine xmlns:a14="http://schemas.microsoft.com/office/drawing/2010/main" xmlns="" w="9525">
                 <a:solidFill>
                   <a:srgbClr val="000000"/>
                 </a:solidFill>
@@ -3815,7 +3815,7 @@
           <a:ln/>
           <a:extLst>
             <a:ext uri="{91240B29-F687-4f45-9708-019B960494DF}">
-              <a14:hiddenLine xmlns="" xmlns:a14="http://schemas.microsoft.com/office/drawing/2010/main" w="9525">
+              <a14:hiddenLine xmlns:a14="http://schemas.microsoft.com/office/drawing/2010/main" xmlns="" w="9525">
                 <a:solidFill>
                   <a:srgbClr val="000000"/>
                 </a:solidFill>
@@ -4244,7 +4244,7 @@
           <a:ln/>
           <a:extLst>
             <a:ext uri="{91240B29-F687-4f45-9708-019B960494DF}">
-              <a14:hiddenLine xmlns="" xmlns:a14="http://schemas.microsoft.com/office/drawing/2010/main" w="9525">
+              <a14:hiddenLine xmlns:a14="http://schemas.microsoft.com/office/drawing/2010/main" xmlns="" w="9525">
                 <a:solidFill>
                   <a:srgbClr val="000000"/>
                 </a:solidFill>
@@ -6477,6 +6477,14 @@
               <a:t>generateKey</a:t>
             </a:r>
             <a:r>
+              <a:rPr lang="en-US" dirty="0"/>
+              <a:t>, </a:t>
+            </a:r>
+            <a:r>
+              <a:rPr lang="en-US" dirty="0" err="1"/>
+              <a:t>deriveKey</a:t>
+            </a:r>
+            <a:r>
               <a:rPr lang="bg-BG" dirty="0"/>
               <a:t>) </a:t>
             </a:r>
